--- a/44_心理学/30_浥尘伙伴社团原创：中高考音乐减压心理训练/PPT制作素材/浥尘伙伴社团原创：中高考音乐减压心理训练.pptx
+++ b/44_心理学/30_浥尘伙伴社团原创：中高考音乐减压心理训练/PPT制作素材/浥尘伙伴社团原创：中高考音乐减压心理训练.pptx
@@ -229,7 +229,7 @@
           <a:p>
             <a:fld id="{613034E8-7B60-43FC-987C-A54D5D393751}" type="datetimeFigureOut">
               <a:rPr lang="zh-CN" altLang="en-US" smtClean="0"/>
-              <a:t>2025/12/2</a:t>
+              <a:t>2025/12/6</a:t>
             </a:fld>
             <a:endParaRPr lang="zh-CN" altLang="en-US"/>
           </a:p>
@@ -605,7 +605,7 @@
                 <a16:creationId xmlns:a16="http://schemas.microsoft.com/office/drawing/2014/main" id="{EA67E988-5919-57BB-C7DE-D3EAD38A3045}"/>
               </a:ext>
               <a:ext uri="{C183D7F6-B498-43B3-948B-1728B52AA6E4}">
-                <adec:decorative xmlns:adec="http://schemas.microsoft.com/office/drawing/2017/decorative" val="1"/>
+                <adec:decorative xmlns:adec="http://schemas.microsoft.com/office/drawing/2017/decorative" xmlns="" val="1"/>
               </a:ext>
             </a:extLst>
           </p:cNvPr>
@@ -861,7 +861,7 @@
           <a:p>
             <a:fld id="{E80C50CD-E178-4744-9B35-B2F624D6C5E9}" type="datetimeFigureOut">
               <a:rPr lang="en-US" smtClean="0"/>
-              <a:t>12/2/2025</a:t>
+              <a:t>12/6/2025</a:t>
             </a:fld>
             <a:endParaRPr lang="en-US"/>
           </a:p>
@@ -1059,7 +1059,7 @@
           <a:p>
             <a:fld id="{E80C50CD-E178-4744-9B35-B2F624D6C5E9}" type="datetimeFigureOut">
               <a:rPr lang="en-US" smtClean="0"/>
-              <a:t>12/2/2025</a:t>
+              <a:t>12/6/2025</a:t>
             </a:fld>
             <a:endParaRPr lang="en-US"/>
           </a:p>
@@ -1267,7 +1267,7 @@
           <a:p>
             <a:fld id="{E80C50CD-E178-4744-9B35-B2F624D6C5E9}" type="datetimeFigureOut">
               <a:rPr lang="en-US" smtClean="0"/>
-              <a:t>12/2/2025</a:t>
+              <a:t>12/6/2025</a:t>
             </a:fld>
             <a:endParaRPr lang="en-US"/>
           </a:p>
@@ -1547,7 +1547,7 @@
           <a:p>
             <a:fld id="{E80C50CD-E178-4744-9B35-B2F624D6C5E9}" type="datetimeFigureOut">
               <a:rPr lang="en-US" smtClean="0"/>
-              <a:t>12/2/2025</a:t>
+              <a:t>12/6/2025</a:t>
             </a:fld>
             <a:endParaRPr lang="en-US"/>
           </a:p>
@@ -1826,7 +1826,7 @@
           <a:p>
             <a:fld id="{E80C50CD-E178-4744-9B35-B2F624D6C5E9}" type="datetimeFigureOut">
               <a:rPr lang="en-US" smtClean="0"/>
-              <a:t>12/2/2025</a:t>
+              <a:t>12/6/2025</a:t>
             </a:fld>
             <a:endParaRPr lang="en-US"/>
           </a:p>
@@ -2143,7 +2143,7 @@
           <a:p>
             <a:fld id="{E80C50CD-E178-4744-9B35-B2F624D6C5E9}" type="datetimeFigureOut">
               <a:rPr lang="en-US" smtClean="0"/>
-              <a:t>12/2/2025</a:t>
+              <a:t>12/6/2025</a:t>
             </a:fld>
             <a:endParaRPr lang="en-US"/>
           </a:p>
@@ -2559,7 +2559,7 @@
           <a:p>
             <a:fld id="{E80C50CD-E178-4744-9B35-B2F624D6C5E9}" type="datetimeFigureOut">
               <a:rPr lang="en-US" smtClean="0"/>
-              <a:t>12/2/2025</a:t>
+              <a:t>12/6/2025</a:t>
             </a:fld>
             <a:endParaRPr lang="en-US"/>
           </a:p>
@@ -2700,7 +2700,7 @@
           <a:p>
             <a:fld id="{E80C50CD-E178-4744-9B35-B2F624D6C5E9}" type="datetimeFigureOut">
               <a:rPr lang="en-US" smtClean="0"/>
-              <a:t>12/2/2025</a:t>
+              <a:t>12/6/2025</a:t>
             </a:fld>
             <a:endParaRPr lang="en-US"/>
           </a:p>
@@ -2813,7 +2813,7 @@
           <a:p>
             <a:fld id="{E80C50CD-E178-4744-9B35-B2F624D6C5E9}" type="datetimeFigureOut">
               <a:rPr lang="en-US" smtClean="0"/>
-              <a:t>12/2/2025</a:t>
+              <a:t>12/6/2025</a:t>
             </a:fld>
             <a:endParaRPr lang="en-US"/>
           </a:p>
@@ -3130,7 +3130,7 @@
           <a:p>
             <a:fld id="{E80C50CD-E178-4744-9B35-B2F624D6C5E9}" type="datetimeFigureOut">
               <a:rPr lang="en-US" smtClean="0"/>
-              <a:t>12/2/2025</a:t>
+              <a:t>12/6/2025</a:t>
             </a:fld>
             <a:endParaRPr lang="en-US"/>
           </a:p>
@@ -3422,7 +3422,7 @@
           <a:p>
             <a:fld id="{E80C50CD-E178-4744-9B35-B2F624D6C5E9}" type="datetimeFigureOut">
               <a:rPr lang="en-US" smtClean="0"/>
-              <a:t>12/2/2025</a:t>
+              <a:t>12/6/2025</a:t>
             </a:fld>
             <a:endParaRPr lang="en-US"/>
           </a:p>
@@ -3658,7 +3658,7 @@
             <a:fld id="{E80C50CD-E178-4744-9B35-B2F624D6C5E9}" type="datetimeFigureOut">
               <a:rPr lang="en-US" smtClean="0"/>
               <a:pPr/>
-              <a:t>12/2/2025</a:t>
+              <a:t>12/6/2025</a:t>
             </a:fld>
             <a:endParaRPr lang="en-US"/>
           </a:p>
@@ -3759,7 +3759,7 @@
                 <a16:creationId xmlns:a16="http://schemas.microsoft.com/office/drawing/2014/main" id="{774A975B-A886-5202-0489-6965514A0D14}"/>
               </a:ext>
               <a:ext uri="{C183D7F6-B498-43B3-948B-1728B52AA6E4}">
-                <adec:decorative xmlns:adec="http://schemas.microsoft.com/office/drawing/2017/decorative" val="1"/>
+                <adec:decorative xmlns:adec="http://schemas.microsoft.com/office/drawing/2017/decorative" xmlns="" val="1"/>
               </a:ext>
             </a:extLst>
           </p:cNvPr>
@@ -4188,7 +4188,7 @@
                 <a16:creationId xmlns:a16="http://schemas.microsoft.com/office/drawing/2014/main" id="{0EECA69B-4C2A-7F31-8019-E90DB3BD49CB}"/>
               </a:ext>
               <a:ext uri="{C183D7F6-B498-43B3-948B-1728B52AA6E4}">
-                <adec:decorative xmlns:adec="http://schemas.microsoft.com/office/drawing/2017/decorative" val="1"/>
+                <adec:decorative xmlns:adec="http://schemas.microsoft.com/office/drawing/2017/decorative" xmlns="" val="1"/>
               </a:ext>
             </a:extLst>
           </p:cNvPr>
@@ -4327,7 +4327,7 @@
                 <a16:creationId xmlns:a16="http://schemas.microsoft.com/office/drawing/2014/main" id="{857DEAC1-B3AA-6569-0A44-A191DF2F3C67}"/>
               </a:ext>
               <a:ext uri="{C183D7F6-B498-43B3-948B-1728B52AA6E4}">
-                <adec:decorative xmlns:adec="http://schemas.microsoft.com/office/drawing/2017/decorative" val="1"/>
+                <adec:decorative xmlns:adec="http://schemas.microsoft.com/office/drawing/2017/decorative" xmlns="" val="1"/>
               </a:ext>
             </a:extLst>
           </p:cNvPr>
@@ -4485,21 +4485,22 @@
               <a:t>浥尘伙伴社团原创密训 </a:t>
             </a:r>
             <a:r>
-              <a:rPr lang="en-US" altLang="zh-CN" sz="1900" dirty="0"/>
-              <a:t>2025</a:t>
-            </a:r>
-            <a:r>
-              <a:rPr lang="zh-CN" altLang="en-US" sz="1900" dirty="0"/>
+              <a:rPr lang="en-US" altLang="zh-CN" sz="1900" dirty="0" smtClean="0"/>
+              <a:t>2026</a:t>
+            </a:r>
+            <a:r>
+              <a:rPr lang="zh-CN" altLang="en-US" sz="1900" dirty="0" smtClean="0"/>
               <a:t>年</a:t>
             </a:r>
             <a:r>
-              <a:rPr lang="en-US" altLang="zh-CN" sz="1900" dirty="0"/>
-              <a:t>12</a:t>
-            </a:r>
-            <a:r>
-              <a:rPr lang="zh-CN" altLang="en-US" sz="1900" dirty="0"/>
+              <a:rPr lang="en-US" altLang="zh-CN" sz="1900" dirty="0" smtClean="0"/>
+              <a:t>1</a:t>
+            </a:r>
+            <a:r>
+              <a:rPr lang="zh-CN" altLang="en-US" sz="1900" dirty="0" smtClean="0"/>
               <a:t>月</a:t>
             </a:r>
+            <a:endParaRPr lang="zh-CN" altLang="en-US" sz="1900" dirty="0"/>
           </a:p>
         </p:txBody>
       </p:sp>
@@ -4566,19 +4567,20 @@
           <a:lstStyle/>
           <a:p>
             <a:r>
-              <a:rPr lang="zh-CN" altLang="en-US" sz="900" dirty="0"/>
+              <a:rPr lang="zh-CN" altLang="en-US" sz="4400" dirty="0"/>
               <a:t>摆渡技术：考前心理总动员</a:t>
             </a:r>
             <a:r>
-              <a:rPr lang="zh-CN" altLang="en-US" sz="900" dirty="0">
+              <a:rPr lang="zh-CN" altLang="en-US" sz="4400" dirty="0">
                 <a:latin typeface="+mn-ea"/>
               </a:rPr>
               <a:t>家长篇</a:t>
             </a:r>
             <a:r>
-              <a:rPr lang="zh-CN" altLang="en-US" sz="900" dirty="0"/>
-              <a:t>（六）</a:t>
-            </a:r>
+              <a:rPr lang="zh-CN" altLang="en-US" sz="4400" dirty="0" smtClean="0"/>
+              <a:t>（九）</a:t>
+            </a:r>
+            <a:endParaRPr lang="zh-CN" altLang="en-US" sz="4400" dirty="0"/>
           </a:p>
         </p:txBody>
       </p:sp>
@@ -5012,19 +5014,20 @@
           <a:lstStyle/>
           <a:p>
             <a:r>
-              <a:rPr lang="zh-CN" altLang="en-US" sz="900" dirty="0"/>
+              <a:rPr lang="zh-CN" altLang="en-US" sz="4400" dirty="0"/>
               <a:t>摆渡技术：考前心理总动员</a:t>
             </a:r>
             <a:r>
-              <a:rPr lang="zh-CN" altLang="en-US" sz="900" dirty="0">
+              <a:rPr lang="zh-CN" altLang="en-US" sz="4400" dirty="0">
                 <a:latin typeface="+mn-ea"/>
               </a:rPr>
               <a:t>家长篇</a:t>
             </a:r>
             <a:r>
-              <a:rPr lang="zh-CN" altLang="en-US" sz="900" dirty="0"/>
-              <a:t>（七）</a:t>
-            </a:r>
+              <a:rPr lang="zh-CN" altLang="en-US" sz="4400" dirty="0" smtClean="0"/>
+              <a:t>（十）</a:t>
+            </a:r>
+            <a:endParaRPr lang="zh-CN" altLang="en-US" sz="4400" dirty="0"/>
           </a:p>
         </p:txBody>
       </p:sp>
@@ -5433,19 +5436,20 @@
           <a:lstStyle/>
           <a:p>
             <a:r>
-              <a:rPr lang="zh-CN" altLang="en-US" sz="900" dirty="0"/>
+              <a:rPr lang="zh-CN" altLang="en-US" sz="4400" dirty="0"/>
               <a:t>摆渡技术：考前心理总动员</a:t>
             </a:r>
             <a:r>
-              <a:rPr lang="zh-CN" altLang="en-US" sz="900" dirty="0">
+              <a:rPr lang="zh-CN" altLang="en-US" sz="4400" dirty="0">
                 <a:latin typeface="+mn-ea"/>
               </a:rPr>
               <a:t>家长篇</a:t>
             </a:r>
             <a:r>
-              <a:rPr lang="zh-CN" altLang="en-US" sz="900" dirty="0"/>
-              <a:t>（八）</a:t>
-            </a:r>
+              <a:rPr lang="zh-CN" altLang="en-US" sz="4400" dirty="0" smtClean="0"/>
+              <a:t>（十一）</a:t>
+            </a:r>
+            <a:endParaRPr lang="zh-CN" altLang="en-US" sz="4400" dirty="0"/>
           </a:p>
         </p:txBody>
       </p:sp>
@@ -5824,19 +5828,20 @@
           <a:lstStyle/>
           <a:p>
             <a:r>
-              <a:rPr lang="zh-CN" altLang="en-US" sz="900" dirty="0"/>
+              <a:rPr lang="zh-CN" altLang="en-US" sz="4400" dirty="0"/>
               <a:t>摆渡技术：考前心理总动员</a:t>
             </a:r>
             <a:r>
-              <a:rPr lang="zh-CN" altLang="en-US" sz="900" dirty="0">
+              <a:rPr lang="zh-CN" altLang="en-US" sz="4400" dirty="0">
                 <a:latin typeface="+mn-ea"/>
               </a:rPr>
               <a:t>家长篇</a:t>
             </a:r>
             <a:r>
-              <a:rPr lang="zh-CN" altLang="en-US" sz="900" dirty="0"/>
-              <a:t>（九）</a:t>
-            </a:r>
+              <a:rPr lang="zh-CN" altLang="en-US" sz="4400" dirty="0" smtClean="0"/>
+              <a:t>（十二）</a:t>
+            </a:r>
+            <a:endParaRPr lang="zh-CN" altLang="en-US" sz="4400" dirty="0"/>
           </a:p>
         </p:txBody>
       </p:sp>
@@ -6254,7 +6259,7 @@
           <a:lstStyle/>
           <a:p>
             <a:r>
-              <a:rPr lang="zh-CN" altLang="en-US" sz="900" dirty="0"/>
+              <a:rPr lang="zh-CN" altLang="en-US" sz="4400" dirty="0"/>
               <a:t>中高考减压音乐摆渡的原理（一）</a:t>
             </a:r>
           </a:p>
@@ -6615,7 +6620,31 @@
               <a:rPr lang="zh-CN" altLang="en-US" sz="1800" dirty="0">
                 <a:latin typeface="+mn-ea"/>
               </a:rPr>
-              <a:t>排毒：滴雨深表抑郁中下</a:t>
+              <a:t>排毒：滴</a:t>
+            </a:r>
+            <a:r>
+              <a:rPr lang="zh-CN" altLang="en-US" sz="1800" dirty="0" smtClean="0">
+                <a:latin typeface="+mn-ea"/>
+              </a:rPr>
+              <a:t>雨</a:t>
+            </a:r>
+            <a:r>
+              <a:rPr lang="zh-CN" altLang="en-US" sz="1800" dirty="0">
+                <a:latin typeface="+mn-ea"/>
+              </a:rPr>
+              <a:t>沉静</a:t>
+            </a:r>
+            <a:r>
+              <a:rPr lang="zh-CN" altLang="en-US" sz="1800" dirty="0" smtClean="0">
+                <a:latin typeface="+mn-ea"/>
+              </a:rPr>
+              <a:t>抑郁</a:t>
+            </a:r>
+            <a:r>
+              <a:rPr lang="zh-CN" altLang="en-US" sz="1800" dirty="0">
+                <a:latin typeface="+mn-ea"/>
+              </a:rPr>
+              <a:t>中下</a:t>
             </a:r>
             <a:endParaRPr lang="en-US" altLang="zh-CN" sz="1800" dirty="0">
               <a:latin typeface="+mn-ea"/>
@@ -6758,7 +6787,7 @@
           <a:lstStyle/>
           <a:p>
             <a:r>
-              <a:rPr lang="zh-CN" altLang="en-US" sz="900" dirty="0"/>
+              <a:rPr lang="zh-CN" altLang="en-US" sz="4400" dirty="0"/>
               <a:t>中高考减压音乐摆渡的原理（二）</a:t>
             </a:r>
           </a:p>
@@ -7148,7 +7177,7 @@
           <a:lstStyle/>
           <a:p>
             <a:r>
-              <a:rPr lang="zh-CN" altLang="en-US" sz="900" dirty="0"/>
+              <a:rPr lang="zh-CN" altLang="en-US" sz="4400" dirty="0"/>
               <a:t>中高考减压音乐摆渡的原理（三）</a:t>
             </a:r>
           </a:p>
@@ -7575,7 +7604,7 @@
           <a:lstStyle/>
           <a:p>
             <a:r>
-              <a:rPr lang="zh-CN" altLang="en-US" sz="900" dirty="0"/>
+              <a:rPr lang="zh-CN" altLang="en-US" sz="4400" dirty="0"/>
               <a:t>中高考减压音乐摆渡的原理（四）</a:t>
             </a:r>
           </a:p>
@@ -7958,7 +7987,7 @@
           <a:lstStyle/>
           <a:p>
             <a:r>
-              <a:rPr lang="zh-CN" altLang="en-US" sz="900" dirty="0"/>
+              <a:rPr lang="zh-CN" altLang="en-US" sz="4400" dirty="0"/>
               <a:t>中高考减压音乐摆渡的原理（五）</a:t>
             </a:r>
           </a:p>
@@ -8371,7 +8400,7 @@
           <a:lstStyle/>
           <a:p>
             <a:r>
-              <a:rPr lang="zh-CN" altLang="en-US" sz="900" dirty="0"/>
+              <a:rPr lang="zh-CN" altLang="en-US" sz="4400" dirty="0"/>
               <a:t>中高考减压音乐摆渡的原理（六）</a:t>
             </a:r>
           </a:p>
@@ -8793,17 +8822,17 @@
           <a:lstStyle/>
           <a:p>
             <a:r>
-              <a:rPr lang="zh-CN" altLang="en-US" sz="900" dirty="0"/>
+              <a:rPr lang="zh-CN" altLang="en-US" sz="4400" dirty="0"/>
               <a:t>摆渡技术：考前心理总动员</a:t>
             </a:r>
             <a:r>
-              <a:rPr lang="zh-CN" altLang="en-US" sz="900" dirty="0">
+              <a:rPr lang="zh-CN" altLang="en-US" sz="4400" dirty="0">
                 <a:latin typeface="+mn-ea"/>
               </a:rPr>
               <a:t>家长篇</a:t>
             </a:r>
             <a:r>
-              <a:rPr lang="zh-CN" altLang="en-US" sz="900" dirty="0"/>
+              <a:rPr lang="zh-CN" altLang="en-US" sz="4400" dirty="0"/>
               <a:t>（一）</a:t>
             </a:r>
           </a:p>
@@ -9157,7 +9186,7 @@
           <a:lstStyle/>
           <a:p>
             <a:r>
-              <a:rPr lang="zh-CN" altLang="en-US" sz="900" dirty="0"/>
+              <a:rPr lang="zh-CN" altLang="en-US" sz="4400" dirty="0"/>
               <a:t>中高考减压音乐摆渡的原理（七）</a:t>
             </a:r>
           </a:p>
@@ -9573,7 +9602,7 @@
           <a:lstStyle/>
           <a:p>
             <a:r>
-              <a:rPr lang="zh-CN" altLang="en-US" sz="900" dirty="0"/>
+              <a:rPr lang="zh-CN" altLang="en-US" sz="4400" dirty="0"/>
               <a:t>中高考减压音乐摆渡的原理（八）</a:t>
             </a:r>
           </a:p>
@@ -9952,7 +9981,7 @@
           <a:lstStyle/>
           <a:p>
             <a:r>
-              <a:rPr lang="zh-CN" altLang="en-US" sz="900" dirty="0"/>
+              <a:rPr lang="zh-CN" altLang="en-US" sz="4400" dirty="0"/>
               <a:t>中高考减压音乐摆渡的原理（九）</a:t>
             </a:r>
           </a:p>
@@ -10368,7 +10397,7 @@
           <a:lstStyle/>
           <a:p>
             <a:r>
-              <a:rPr lang="zh-CN" altLang="en-US" sz="900" dirty="0"/>
+              <a:rPr lang="zh-CN" altLang="en-US" sz="4400" dirty="0"/>
               <a:t>中高考减压音乐摆渡的原理（十）</a:t>
             </a:r>
           </a:p>
@@ -10762,7 +10791,7 @@
           <a:lstStyle/>
           <a:p>
             <a:r>
-              <a:rPr lang="zh-CN" altLang="en-US" sz="900" dirty="0"/>
+              <a:rPr lang="zh-CN" altLang="en-US" sz="4400" dirty="0"/>
               <a:t>中高考减压音乐摆渡的原理（十一）</a:t>
             </a:r>
           </a:p>
@@ -11175,7 +11204,7 @@
           <a:lstStyle/>
           <a:p>
             <a:r>
-              <a:rPr lang="zh-CN" altLang="en-US" sz="900" dirty="0"/>
+              <a:rPr lang="zh-CN" altLang="en-US" sz="4400" dirty="0"/>
               <a:t>中高考减压音乐摆渡的原理（十二）</a:t>
             </a:r>
           </a:p>
@@ -11596,7 +11625,7 @@
           <a:lstStyle/>
           <a:p>
             <a:r>
-              <a:rPr lang="zh-CN" altLang="en-US" sz="900" dirty="0"/>
+              <a:rPr lang="zh-CN" altLang="en-US" sz="4400" dirty="0"/>
               <a:t>中高考减压音乐摆渡的原理（十三）</a:t>
             </a:r>
           </a:p>
@@ -11931,7 +11960,7 @@
           <a:lstStyle/>
           <a:p>
             <a:r>
-              <a:rPr lang="zh-CN" altLang="en-US" sz="900" dirty="0"/>
+              <a:rPr lang="zh-CN" altLang="en-US" sz="4400" dirty="0"/>
               <a:t>中高考音乐减压的其他注意事项</a:t>
             </a:r>
           </a:p>
@@ -12151,7 +12180,7 @@
           <a:lstStyle/>
           <a:p>
             <a:r>
-              <a:rPr lang="zh-CN" altLang="en-US" sz="900" dirty="0"/>
+              <a:rPr lang="zh-CN" altLang="en-US" sz="4400" dirty="0"/>
               <a:t>中高考音乐减压之秘籍：六脉神剑（一）</a:t>
             </a:r>
           </a:p>
@@ -13020,7 +13049,7 @@
           <p:nvPr/>
         </p:nvPicPr>
         <p:blipFill>
-          <a:blip r:embed="rId2">
+          <a:blip r:embed="rId2" cstate="hqprint">
             <a:extLst>
               <a:ext uri="{28A0092B-C50C-407E-A947-70E740481C1C}">
                 <a14:useLocalDpi xmlns:a14="http://schemas.microsoft.com/office/drawing/2010/main" val="0"/>
@@ -13051,6 +13080,13 @@
   <p:clrMapOvr>
     <a:masterClrMapping/>
   </p:clrMapOvr>
+  <p:timing>
+    <p:tnLst>
+      <p:par>
+        <p:cTn id="1" dur="indefinite" restart="never" nodeType="tmRoot"/>
+      </p:par>
+    </p:tnLst>
+  </p:timing>
 </p:sld>
 </file>
 
@@ -13104,7 +13140,7 @@
           <a:lstStyle/>
           <a:p>
             <a:r>
-              <a:rPr lang="zh-CN" altLang="en-US" sz="900" dirty="0"/>
+              <a:rPr lang="zh-CN" altLang="en-US" sz="4400" dirty="0"/>
               <a:t>中高考音乐减压之秘籍：六脉神剑（二）</a:t>
             </a:r>
           </a:p>
@@ -14003,7 +14039,7 @@
           <p:nvPr/>
         </p:nvPicPr>
         <p:blipFill>
-          <a:blip r:embed="rId2">
+          <a:blip r:embed="rId2" cstate="hqprint">
             <a:extLst>
               <a:ext uri="{28A0092B-C50C-407E-A947-70E740481C1C}">
                 <a14:useLocalDpi xmlns:a14="http://schemas.microsoft.com/office/drawing/2010/main" val="0"/>
@@ -14248,6 +14284,13 @@
   <p:clrMapOvr>
     <a:masterClrMapping/>
   </p:clrMapOvr>
+  <p:timing>
+    <p:tnLst>
+      <p:par>
+        <p:cTn id="1" dur="indefinite" restart="never" nodeType="tmRoot"/>
+      </p:par>
+    </p:tnLst>
+  </p:timing>
 </p:sld>
 </file>
 
@@ -14301,19 +14344,20 @@
           <a:lstStyle/>
           <a:p>
             <a:r>
-              <a:rPr lang="zh-CN" altLang="en-US" sz="900" dirty="0"/>
+              <a:rPr lang="zh-CN" altLang="en-US" sz="4400" dirty="0"/>
               <a:t>摆渡技术：考前心理总动员</a:t>
             </a:r>
             <a:r>
-              <a:rPr lang="zh-CN" altLang="en-US" sz="900" dirty="0">
+              <a:rPr lang="zh-CN" altLang="en-US" sz="4400" dirty="0">
                 <a:latin typeface="+mn-ea"/>
               </a:rPr>
               <a:t>家长篇</a:t>
             </a:r>
             <a:r>
-              <a:rPr lang="zh-CN" altLang="en-US" sz="900" dirty="0"/>
-              <a:t>（一）</a:t>
-            </a:r>
+              <a:rPr lang="zh-CN" altLang="en-US" sz="4400" dirty="0" smtClean="0"/>
+              <a:t>（二）</a:t>
+            </a:r>
+            <a:endParaRPr lang="zh-CN" altLang="en-US" sz="4400" dirty="0"/>
           </a:p>
         </p:txBody>
       </p:sp>
@@ -14989,7 +15033,7 @@
           <a:lstStyle/>
           <a:p>
             <a:r>
-              <a:rPr lang="zh-CN" altLang="en-US" sz="900" dirty="0"/>
+              <a:rPr lang="zh-CN" altLang="en-US" sz="4400" dirty="0"/>
               <a:t>中高考音乐减压之秘籍：六脉神剑（三）</a:t>
             </a:r>
           </a:p>
@@ -15650,7 +15694,7 @@
           <p:nvPr/>
         </p:nvPicPr>
         <p:blipFill>
-          <a:blip r:embed="rId2">
+          <a:blip r:embed="rId2" cstate="hqprint">
             <a:extLst>
               <a:ext uri="{28A0092B-C50C-407E-A947-70E740481C1C}">
                 <a14:useLocalDpi xmlns:a14="http://schemas.microsoft.com/office/drawing/2010/main" val="0"/>
@@ -15895,6 +15939,13 @@
   <p:clrMapOvr>
     <a:masterClrMapping/>
   </p:clrMapOvr>
+  <p:timing>
+    <p:tnLst>
+      <p:par>
+        <p:cTn id="1" dur="indefinite" restart="never" nodeType="tmRoot"/>
+      </p:par>
+    </p:tnLst>
+  </p:timing>
 </p:sld>
 </file>
 
@@ -15948,7 +15999,7 @@
           <a:lstStyle/>
           <a:p>
             <a:r>
-              <a:rPr lang="zh-CN" altLang="en-US" sz="900" dirty="0"/>
+              <a:rPr lang="zh-CN" altLang="en-US" sz="4400" dirty="0"/>
               <a:t>中高考音乐减压之秘籍：六脉神剑（四）</a:t>
             </a:r>
           </a:p>
@@ -16534,7 +16585,7 @@
           <p:nvPr/>
         </p:nvPicPr>
         <p:blipFill>
-          <a:blip r:embed="rId2">
+          <a:blip r:embed="rId2" cstate="hqprint">
             <a:extLst>
               <a:ext uri="{28A0092B-C50C-407E-A947-70E740481C1C}">
                 <a14:useLocalDpi xmlns:a14="http://schemas.microsoft.com/office/drawing/2010/main" val="0"/>
@@ -17371,6 +17422,13 @@
   <p:clrMapOvr>
     <a:masterClrMapping/>
   </p:clrMapOvr>
+  <p:timing>
+    <p:tnLst>
+      <p:par>
+        <p:cTn id="1" dur="indefinite" restart="never" nodeType="tmRoot"/>
+      </p:par>
+    </p:tnLst>
+  </p:timing>
 </p:sld>
 </file>
 
@@ -17424,7 +17482,7 @@
           <a:lstStyle/>
           <a:p>
             <a:r>
-              <a:rPr lang="zh-CN" altLang="en-US" sz="900" dirty="0"/>
+              <a:rPr lang="zh-CN" altLang="en-US" sz="4400" dirty="0"/>
               <a:t>中高考音乐减压之秘籍：六脉神剑（五）</a:t>
             </a:r>
           </a:p>
@@ -18419,7 +18477,7 @@
           <p:nvPr/>
         </p:nvPicPr>
         <p:blipFill>
-          <a:blip r:embed="rId2">
+          <a:blip r:embed="rId2" cstate="hqprint">
             <a:extLst>
               <a:ext uri="{28A0092B-C50C-407E-A947-70E740481C1C}">
                 <a14:useLocalDpi xmlns:a14="http://schemas.microsoft.com/office/drawing/2010/main" val="0"/>
@@ -18664,6 +18722,13 @@
   <p:clrMapOvr>
     <a:masterClrMapping/>
   </p:clrMapOvr>
+  <p:timing>
+    <p:tnLst>
+      <p:par>
+        <p:cTn id="1" dur="indefinite" restart="never" nodeType="tmRoot"/>
+      </p:par>
+    </p:tnLst>
+  </p:timing>
 </p:sld>
 </file>
 
@@ -18717,7 +18782,7 @@
           <a:lstStyle/>
           <a:p>
             <a:r>
-              <a:rPr lang="zh-CN" altLang="en-US" sz="900" dirty="0"/>
+              <a:rPr lang="zh-CN" altLang="en-US" sz="4400" dirty="0"/>
               <a:t>中高考音乐减压之秘籍：六脉神剑（六）</a:t>
             </a:r>
           </a:p>
@@ -19293,7 +19358,7 @@
           <p:nvPr/>
         </p:nvPicPr>
         <p:blipFill>
-          <a:blip r:embed="rId2">
+          <a:blip r:embed="rId2" cstate="hqprint">
             <a:extLst>
               <a:ext uri="{28A0092B-C50C-407E-A947-70E740481C1C}">
                 <a14:useLocalDpi xmlns:a14="http://schemas.microsoft.com/office/drawing/2010/main" val="0"/>
@@ -19591,19 +19656,20 @@
           <a:lstStyle/>
           <a:p>
             <a:r>
-              <a:rPr lang="zh-CN" altLang="en-US" sz="900" dirty="0"/>
+              <a:rPr lang="zh-CN" altLang="en-US" sz="4400" dirty="0"/>
               <a:t>摆渡技术：考前心理总动员</a:t>
             </a:r>
             <a:r>
-              <a:rPr lang="zh-CN" altLang="en-US" sz="900" dirty="0">
+              <a:rPr lang="zh-CN" altLang="en-US" sz="4400" dirty="0">
                 <a:latin typeface="+mn-ea"/>
               </a:rPr>
               <a:t>家长篇</a:t>
             </a:r>
             <a:r>
-              <a:rPr lang="zh-CN" altLang="en-US" sz="900" dirty="0"/>
-              <a:t>（二）</a:t>
-            </a:r>
+              <a:rPr lang="zh-CN" altLang="en-US" sz="4400" dirty="0" smtClean="0"/>
+              <a:t>（三）</a:t>
+            </a:r>
+            <a:endParaRPr lang="zh-CN" altLang="en-US" sz="4400" dirty="0"/>
           </a:p>
         </p:txBody>
       </p:sp>
@@ -20282,19 +20348,20 @@
           <a:lstStyle/>
           <a:p>
             <a:r>
-              <a:rPr lang="zh-CN" altLang="en-US" sz="900" dirty="0"/>
+              <a:rPr lang="zh-CN" altLang="en-US" sz="4400" dirty="0"/>
               <a:t>摆渡技术：考前心理总动员</a:t>
             </a:r>
             <a:r>
-              <a:rPr lang="zh-CN" altLang="en-US" sz="900" dirty="0">
+              <a:rPr lang="zh-CN" altLang="en-US" sz="4400" dirty="0">
                 <a:latin typeface="+mn-ea"/>
               </a:rPr>
               <a:t>家长篇</a:t>
             </a:r>
             <a:r>
-              <a:rPr lang="zh-CN" altLang="en-US" sz="900" dirty="0"/>
-              <a:t>（三）</a:t>
-            </a:r>
+              <a:rPr lang="zh-CN" altLang="en-US" sz="4400" dirty="0" smtClean="0"/>
+              <a:t>（四）</a:t>
+            </a:r>
+            <a:endParaRPr lang="zh-CN" altLang="en-US" sz="4400" dirty="0"/>
           </a:p>
         </p:txBody>
       </p:sp>
@@ -21572,19 +21639,20 @@
           <a:lstStyle/>
           <a:p>
             <a:r>
-              <a:rPr lang="zh-CN" altLang="en-US" sz="900" dirty="0"/>
+              <a:rPr lang="zh-CN" altLang="en-US" sz="4400" dirty="0"/>
               <a:t>摆渡技术：考前心理总动员</a:t>
             </a:r>
             <a:r>
-              <a:rPr lang="zh-CN" altLang="en-US" sz="900" dirty="0">
+              <a:rPr lang="zh-CN" altLang="en-US" sz="4400" dirty="0">
                 <a:latin typeface="+mn-ea"/>
               </a:rPr>
               <a:t>家长篇</a:t>
             </a:r>
             <a:r>
-              <a:rPr lang="zh-CN" altLang="en-US" sz="900" dirty="0"/>
-              <a:t>（四）</a:t>
-            </a:r>
+              <a:rPr lang="zh-CN" altLang="en-US" sz="4400" dirty="0" smtClean="0"/>
+              <a:t>（五）</a:t>
+            </a:r>
+            <a:endParaRPr lang="zh-CN" altLang="en-US" sz="4400" dirty="0"/>
           </a:p>
         </p:txBody>
       </p:sp>
@@ -21894,7 +21962,7 @@
         </p:nvSpPr>
         <p:spPr>
           <a:xfrm>
-            <a:off x="515112" y="1321375"/>
+            <a:off x="518160" y="1468780"/>
             <a:ext cx="5312855" cy="2107686"/>
           </a:xfrm>
           <a:prstGeom prst="rect">
@@ -22106,7 +22174,7 @@
         </p:nvSpPr>
         <p:spPr>
           <a:xfrm>
-            <a:off x="6096000" y="1245580"/>
+            <a:off x="6096000" y="1421461"/>
             <a:ext cx="5574792" cy="2554087"/>
           </a:xfrm>
           <a:prstGeom prst="rect">
@@ -22375,19 +22443,20 @@
           <a:lstStyle/>
           <a:p>
             <a:r>
-              <a:rPr lang="zh-CN" altLang="en-US" sz="900" dirty="0"/>
+              <a:rPr lang="zh-CN" altLang="en-US" sz="4400" dirty="0"/>
               <a:t>摆渡技术：考前心理总动员</a:t>
             </a:r>
             <a:r>
-              <a:rPr lang="zh-CN" altLang="en-US" sz="900" dirty="0">
+              <a:rPr lang="zh-CN" altLang="en-US" sz="4400" dirty="0">
                 <a:latin typeface="+mn-ea"/>
               </a:rPr>
               <a:t>家长篇</a:t>
             </a:r>
             <a:r>
-              <a:rPr lang="zh-CN" altLang="en-US" sz="900" dirty="0"/>
-              <a:t>（五）</a:t>
-            </a:r>
+              <a:rPr lang="zh-CN" altLang="en-US" sz="4400" dirty="0" smtClean="0"/>
+              <a:t>（六）</a:t>
+            </a:r>
+            <a:endParaRPr lang="zh-CN" altLang="en-US" sz="4400" dirty="0"/>
           </a:p>
         </p:txBody>
       </p:sp>
@@ -22755,19 +22824,20 @@
           <a:lstStyle/>
           <a:p>
             <a:r>
-              <a:rPr lang="zh-CN" altLang="en-US" sz="900" dirty="0"/>
+              <a:rPr lang="zh-CN" altLang="en-US" sz="4400" dirty="0"/>
               <a:t>摆渡技术：考前心理总动员</a:t>
             </a:r>
             <a:r>
-              <a:rPr lang="zh-CN" altLang="en-US" sz="900" dirty="0">
+              <a:rPr lang="zh-CN" altLang="en-US" sz="4400" dirty="0">
                 <a:latin typeface="+mn-ea"/>
               </a:rPr>
               <a:t>家长篇</a:t>
             </a:r>
             <a:r>
-              <a:rPr lang="zh-CN" altLang="en-US" sz="900" dirty="0"/>
-              <a:t>（五）</a:t>
-            </a:r>
+              <a:rPr lang="zh-CN" altLang="en-US" sz="4400" dirty="0" smtClean="0"/>
+              <a:t>（七）</a:t>
+            </a:r>
+            <a:endParaRPr lang="zh-CN" altLang="en-US" sz="4400" dirty="0"/>
           </a:p>
         </p:txBody>
       </p:sp>
@@ -23413,19 +23483,20 @@
           <a:lstStyle/>
           <a:p>
             <a:r>
-              <a:rPr lang="zh-CN" altLang="en-US" sz="900" dirty="0"/>
+              <a:rPr lang="zh-CN" altLang="en-US" sz="4400" dirty="0"/>
               <a:t>摆渡技术：考前心理总动员</a:t>
             </a:r>
             <a:r>
-              <a:rPr lang="zh-CN" altLang="en-US" sz="900" dirty="0">
+              <a:rPr lang="zh-CN" altLang="en-US" sz="4400" dirty="0">
                 <a:latin typeface="+mn-ea"/>
               </a:rPr>
               <a:t>家长篇</a:t>
             </a:r>
             <a:r>
-              <a:rPr lang="zh-CN" altLang="en-US" sz="900" dirty="0"/>
-              <a:t>（五）</a:t>
-            </a:r>
+              <a:rPr lang="zh-CN" altLang="en-US" sz="4400" dirty="0" smtClean="0"/>
+              <a:t>（八）</a:t>
+            </a:r>
+            <a:endParaRPr lang="zh-CN" altLang="en-US" sz="4400" dirty="0"/>
           </a:p>
         </p:txBody>
       </p:sp>
